--- a/Topic_A/Exam_Practice/AT-A-L08_Writing_Workshop_Doctor_Pharmacy_and_Advice.pptx
+++ b/Topic_A/Exam_Practice/AT-A-L08_Writing_Workshop_Doctor_Pharmacy_and_Advice.pptx
@@ -784,7 +784,11 @@
           <a:lstStyle/>
           <a:p>
             <a:r>
-              <a:rPr lang="en-US" dirty="0"/>
+              <a:rPr lang="ar-SA" dirty="0">
+                <a:latin typeface="Amiri" pitchFamily="2" charset="-78"/>
+                <a:ea typeface="Amiri" pitchFamily="2" charset="-78"/>
+                <a:cs typeface="Amiri" pitchFamily="2" charset="-78"/>
+              </a:rPr>
               <a:t>Q3 (3 min to choose and read). Title (أ) suits Core and Develop; title (ب) suits Stretch.</a:t>
             </a:r>
             <a:endParaRPr lang="en-US" dirty="0"/>
@@ -1403,7 +1407,11 @@
           <a:lstStyle/>
           <a:p>
             <a:r>
-              <a:rPr lang="en-US" dirty="0"/>
+              <a:rPr lang="ar-SA" dirty="0">
+                <a:latin typeface="Amiri" pitchFamily="2" charset="-78"/>
+                <a:ea typeface="Amiri" pitchFamily="2" charset="-78"/>
+                <a:cs typeface="Amiri" pitchFamily="2" charset="-78"/>
+              </a:rPr>
               <a:t>WELCOME (1 min) — while students join.
 • Greet each student by name as they arrive: السَّلَامُ عَلَيْكُمْ. Take the register (Pastoral Tracker: attendance 0/1).
 • 2-MINUTE CHECK-IN (SEND training): a private chat to any student who seemed unsettled last lesson — “Are you okay today? 👍 / 👎”.
@@ -1936,7 +1944,11 @@
           <a:lstStyle/>
           <a:p>
             <a:r>
-              <a:rPr lang="en-US" dirty="0"/>
+              <a:rPr lang="ar-SA" dirty="0">
+                <a:latin typeface="Amiri" pitchFamily="2" charset="-78"/>
+                <a:ea typeface="Amiri" pitchFamily="2" charset="-78"/>
+                <a:cs typeface="Amiri" pitchFamily="2" charset="-78"/>
+              </a:rPr>
               <a:t>Question words: لِمَاذَا (why) · مَاذَا (what) · كَيْفَ (how) · مَا (what) · مَتَى (when) — the rubric here speaks to a girl (ghibti, tarjiʿīna).</a:t>
             </a:r>
             <a:endParaRPr lang="en-US" dirty="0"/>
@@ -2508,6 +2520,7 @@
                   <a:srgbClr val="D4AF37"/>
                 </a:solidFill>
                 <a:latin typeface="Amiri" pitchFamily="2" charset="-78"/>
+                <a:ea typeface="Amiri" pitchFamily="2" charset="-78"/>
                 <a:cs typeface="Amiri" pitchFamily="2" charset="-78"/>
               </a:rPr>
               <a:t>م</a:t>
@@ -2714,6 +2727,7 @@
                   <a:srgbClr val="D4AF37"/>
                 </a:solidFill>
                 <a:latin typeface="Amiri" pitchFamily="2" charset="-78"/>
+                <a:ea typeface="Amiri" pitchFamily="2" charset="-78"/>
                 <a:cs typeface="Amiri" pitchFamily="2" charset="-78"/>
               </a:rPr>
               <a:t>وَرْشَةُ الكِتَابَةِ — عِنْدَ الطَّبِيبِ وَفِي الصَّيْدَلِيَّةِ</a:t>
@@ -3171,6 +3185,7 @@
                   <a:srgbClr val="D4AF37"/>
                 </a:solidFill>
                 <a:latin typeface="Amiri" pitchFamily="2" charset="-78"/>
+                <a:ea typeface="Amiri" pitchFamily="2" charset="-78"/>
                 <a:cs typeface="Amiri" pitchFamily="2" charset="-78"/>
               </a:rPr>
               <a:t>م</a:t>
@@ -3491,6 +3506,7 @@
                   <a:srgbClr val="8A6D1E"/>
                 </a:solidFill>
                 <a:latin typeface="Amiri" pitchFamily="2" charset="-78"/>
+                <a:ea typeface="Amiri" pitchFamily="2" charset="-78"/>
                 <a:cs typeface="Amiri" pitchFamily="2" charset="-78"/>
               </a:rPr>
               <a:t>نَمُوذَجُ الإِجَابَةِ</a:t>
@@ -3604,6 +3620,7 @@
                   <a:srgbClr val="1F2A37"/>
                 </a:solidFill>
                 <a:latin typeface="Amiri" pitchFamily="2" charset="-78"/>
+                <a:ea typeface="Amiri" pitchFamily="2" charset="-78"/>
                 <a:cs typeface="Amiri" pitchFamily="2" charset="-78"/>
               </a:rPr>
               <a:t>مَرْحَبًا يَا لَيْلَى،</a:t>
@@ -3623,6 +3640,7 @@
                   <a:srgbClr val="1F2A37"/>
                 </a:solidFill>
                 <a:latin typeface="Amiri" pitchFamily="2" charset="-78"/>
+                <a:ea typeface="Amiri" pitchFamily="2" charset="-78"/>
                 <a:cs typeface="Amiri" pitchFamily="2" charset="-78"/>
               </a:rPr>
               <a:t>كَيْفَ حَالُكِ؟ أَمْسِ ذَهَبْتُ إِلَى الطَّبِيبِ، لِأَنَّ حَلْقِي كَانَ يُؤْلِمُنِي، وَكَانَ عِنْدِي حُمَّى. فَحَصَنِي الطَّبِيبُ، وَقَالَ: «عِنْدَكِ التِهَابٌ فِي الحَلْقِ». بَعْدَ ذٰلِكَ ذَهَبْتُ إِلَى الصَّيْدَلِيَّةِ، وَاشْتَرَيْتُ شَرَابًا وَحُبُوبًا. آخُذُ الدَّوَاءَ ثَلَاثَ مَرَّاتٍ فِي اليَوْمِ بَعْدَ الأَكْلِ. نَصَحَنِي الطَّبِيبُ بِأَنْ أَرْتَاحَ فِي البَيْتِ يَوْمَيْنِ، وَأَنْ أَشْرَبَ المَاءَ كَثِيرًا. سَأَرْجِعُ إِلَى المَدْرَسَةِ يَوْمَ الأَحَدِ.</a:t>
@@ -3642,6 +3660,7 @@
                   <a:srgbClr val="1F2A37"/>
                 </a:solidFill>
                 <a:latin typeface="Amiri" pitchFamily="2" charset="-78"/>
+                <a:ea typeface="Amiri" pitchFamily="2" charset="-78"/>
                 <a:cs typeface="Amiri" pitchFamily="2" charset="-78"/>
               </a:rPr>
               <a:t>مَعَ السَّلَامَةِ،</a:t>
@@ -3661,6 +3680,7 @@
                   <a:srgbClr val="1F2A37"/>
                 </a:solidFill>
                 <a:latin typeface="Amiri" pitchFamily="2" charset="-78"/>
+                <a:ea typeface="Amiri" pitchFamily="2" charset="-78"/>
                 <a:cs typeface="Amiri" pitchFamily="2" charset="-78"/>
               </a:rPr>
               <a:t>مَرْيَمُ</a:t>
@@ -3824,11 +3844,12 @@
               <a:buNone/>
             </a:pPr>
             <a:r>
-              <a:rPr lang="en-US" sz="950" b="1" dirty="0">
+              <a:rPr lang="ar-SA" sz="950" b="1" dirty="0">
                 <a:solidFill>
                   <a:srgbClr val="FFFFFF"/>
                 </a:solidFill>
                 <a:latin typeface="Calibri" pitchFamily="34" charset="0"/>
+                <a:ea typeface="Amiri" pitchFamily="2" charset="-78"/>
                 <a:cs typeface="Amiri" pitchFamily="2" charset="-78"/>
               </a:rPr>
               <a:t>ذَهَبْتُ إِلَى الطَّبِيبِ</a:t>
@@ -3889,11 +3910,12 @@
               <a:buNone/>
             </a:pPr>
             <a:r>
-              <a:rPr lang="en-US" sz="950" b="1" dirty="0">
+              <a:rPr lang="ar-SA" sz="950" b="1" dirty="0">
                 <a:solidFill>
                   <a:srgbClr val="FFFFFF"/>
                 </a:solidFill>
                 <a:latin typeface="Calibri" pitchFamily="34" charset="0"/>
+                <a:ea typeface="Amiri" pitchFamily="2" charset="-78"/>
                 <a:cs typeface="Amiri" pitchFamily="2" charset="-78"/>
               </a:rPr>
               <a:t>فَحَصَنِي</a:t>
@@ -3954,11 +3976,12 @@
               <a:buNone/>
             </a:pPr>
             <a:r>
-              <a:rPr lang="en-US" sz="950" b="1" dirty="0">
+              <a:rPr lang="ar-SA" sz="950" b="1" dirty="0">
                 <a:solidFill>
                   <a:srgbClr val="FFFFFF"/>
                 </a:solidFill>
                 <a:latin typeface="Calibri" pitchFamily="34" charset="0"/>
+                <a:ea typeface="Amiri" pitchFamily="2" charset="-78"/>
                 <a:cs typeface="Amiri" pitchFamily="2" charset="-78"/>
               </a:rPr>
               <a:t>ثَلَاثَ مَرَّاتٍ</a:t>
@@ -4019,11 +4042,12 @@
               <a:buNone/>
             </a:pPr>
             <a:r>
-              <a:rPr lang="en-US" sz="950" b="1" dirty="0">
+              <a:rPr lang="ar-SA" sz="950" b="1" dirty="0">
                 <a:solidFill>
                   <a:srgbClr val="FFFFFF"/>
                 </a:solidFill>
                 <a:latin typeface="Calibri" pitchFamily="34" charset="0"/>
+                <a:ea typeface="Amiri" pitchFamily="2" charset="-78"/>
                 <a:cs typeface="Amiri" pitchFamily="2" charset="-78"/>
               </a:rPr>
               <a:t>نَصَحَنِي … بِأَنْ أَرْتَاحَ</a:t>
@@ -4157,6 +4181,7 @@
                   <a:srgbClr val="D4AF37"/>
                 </a:solidFill>
                 <a:latin typeface="Amiri" pitchFamily="2" charset="-78"/>
+                <a:ea typeface="Amiri" pitchFamily="2" charset="-78"/>
                 <a:cs typeface="Amiri" pitchFamily="2" charset="-78"/>
               </a:rPr>
               <a:t>م</a:t>
@@ -4477,6 +4502,7 @@
                   <a:srgbClr val="8A6D1E"/>
                 </a:solidFill>
                 <a:latin typeface="Amiri" pitchFamily="2" charset="-78"/>
+                <a:ea typeface="Amiri" pitchFamily="2" charset="-78"/>
                 <a:cs typeface="Amiri" pitchFamily="2" charset="-78"/>
               </a:rPr>
               <a:t>نَمُوذَجُ الإِجَابَةِ</a:t>
@@ -4590,6 +4616,7 @@
                   <a:srgbClr val="1F2A37"/>
                 </a:solidFill>
                 <a:latin typeface="Amiri" pitchFamily="2" charset="-78"/>
+                <a:ea typeface="Amiri" pitchFamily="2" charset="-78"/>
                 <a:cs typeface="Amiri" pitchFamily="2" charset="-78"/>
               </a:rPr>
               <a:t>عَزِيزَتِي لَيْلَى،</a:t>
@@ -4609,6 +4636,7 @@
                   <a:srgbClr val="1F2A37"/>
                 </a:solidFill>
                 <a:latin typeface="Amiri" pitchFamily="2" charset="-78"/>
+                <a:ea typeface="Amiri" pitchFamily="2" charset="-78"/>
                 <a:cs typeface="Amiri" pitchFamily="2" charset="-78"/>
               </a:rPr>
               <a:t>تَحِيَّةً طَيِّبَةً، وَبَعْدُ، فَقَدْ سَأَلْتِنِي لِمَاذَا غِبْتُ عَنِ المَدْرَسَةِ. أَمْسِ اسْتَيْقَظْتُ وَحَلْقِي يُؤْلِمُنِي بِشِدَّةٍ، وَكَانَتْ حَرَارَتِي مُرْتَفِعَةً، فَحَجَزَتْ لِي أُمِّي مَوْعِدًا فِي العِيَادَةِ. فَحَصَنِي الطَّبِيبُ بِعِنَايَةٍ، وَقَالَ إِنَّ عِنْدِي التِهَابًا فِي الحَلْقِ، ثُمَّ كَتَبَ لِي وَصْفَةً. فِي الصَّيْدَلِيَّةِ شَرَحَ لِي الصَّيْدَلِيُّ أَنْ آخُذَ حَبَّةً مَرَّتَيْنِ فِي اليَوْمِ بَعْدَ الأَكْلِ، خَمْسَةَ أَيَّامٍ. نَصَحَنِي الطَّبِيبُ بِأَنْ أَرْتَاحَ، وَأَلَّا أَشْرَبَ المَشْرُوبَاتِ البَارِدَةَ. أَشْعُرُ بِتَحَسُّنٍ اليَوْمَ، وَالحُمَّى أَقَلُّ مِنْ أَمْسِ، وَسَأَرْجِعُ إِلَى المَدْرَسَةِ يَوْمَ الإِثْنَيْنِ إِنْ شَاءَ اللّٰهُ.</a:t>
@@ -4628,6 +4656,7 @@
                   <a:srgbClr val="1F2A37"/>
                 </a:solidFill>
                 <a:latin typeface="Amiri" pitchFamily="2" charset="-78"/>
+                <a:ea typeface="Amiri" pitchFamily="2" charset="-78"/>
                 <a:cs typeface="Amiri" pitchFamily="2" charset="-78"/>
               </a:rPr>
               <a:t>هَلْ يُمْكِنُ أَنْ تُرْسِلِي لِي الوَاجِبَ؟</a:t>
@@ -4647,6 +4676,7 @@
                   <a:srgbClr val="1F2A37"/>
                 </a:solidFill>
                 <a:latin typeface="Amiri" pitchFamily="2" charset="-78"/>
+                <a:ea typeface="Amiri" pitchFamily="2" charset="-78"/>
                 <a:cs typeface="Amiri" pitchFamily="2" charset="-78"/>
               </a:rPr>
               <a:t>مَعَ مَحَبَّتِي،</a:t>
@@ -4666,6 +4696,7 @@
                   <a:srgbClr val="1F2A37"/>
                 </a:solidFill>
                 <a:latin typeface="Amiri" pitchFamily="2" charset="-78"/>
+                <a:ea typeface="Amiri" pitchFamily="2" charset="-78"/>
                 <a:cs typeface="Amiri" pitchFamily="2" charset="-78"/>
               </a:rPr>
               <a:t>مَرْيَمُ</a:t>
@@ -4829,11 +4860,12 @@
               <a:buNone/>
             </a:pPr>
             <a:r>
-              <a:rPr lang="en-US" sz="950" b="1" dirty="0">
+              <a:rPr lang="ar-SA" sz="950" b="1" dirty="0">
                 <a:solidFill>
                   <a:srgbClr val="FFFFFF"/>
                 </a:solidFill>
                 <a:latin typeface="Calibri" pitchFamily="34" charset="0"/>
+                <a:ea typeface="Amiri" pitchFamily="2" charset="-78"/>
                 <a:cs typeface="Amiri" pitchFamily="2" charset="-78"/>
               </a:rPr>
               <a:t>فَحَجَزَتْ لِي أُمِّي مَوْعِدًا</a:t>
@@ -4894,11 +4926,12 @@
               <a:buNone/>
             </a:pPr>
             <a:r>
-              <a:rPr lang="en-US" sz="950" b="1" dirty="0">
+              <a:rPr lang="ar-SA" sz="950" b="1" dirty="0">
                 <a:solidFill>
                   <a:srgbClr val="FFFFFF"/>
                 </a:solidFill>
                 <a:latin typeface="Calibri" pitchFamily="34" charset="0"/>
+                <a:ea typeface="Amiri" pitchFamily="2" charset="-78"/>
                 <a:cs typeface="Amiri" pitchFamily="2" charset="-78"/>
               </a:rPr>
               <a:t>قَالَ إِنَّ عِنْدِي</a:t>
@@ -4959,11 +4992,12 @@
               <a:buNone/>
             </a:pPr>
             <a:r>
-              <a:rPr lang="en-US" sz="950" b="1" dirty="0">
+              <a:rPr lang="ar-SA" sz="950" b="1" dirty="0">
                 <a:solidFill>
                   <a:srgbClr val="FFFFFF"/>
                 </a:solidFill>
                 <a:latin typeface="Calibri" pitchFamily="34" charset="0"/>
+                <a:ea typeface="Amiri" pitchFamily="2" charset="-78"/>
                 <a:cs typeface="Amiri" pitchFamily="2" charset="-78"/>
               </a:rPr>
               <a:t>مَرَّتَيْنِ فِي اليَوْمِ بَعْدَ الأَكْلِ</a:t>
@@ -5024,11 +5058,12 @@
               <a:buNone/>
             </a:pPr>
             <a:r>
-              <a:rPr lang="en-US" sz="950" b="1" dirty="0">
+              <a:rPr lang="ar-SA" sz="950" b="1" dirty="0">
                 <a:solidFill>
                   <a:srgbClr val="FFFFFF"/>
                 </a:solidFill>
                 <a:latin typeface="Calibri" pitchFamily="34" charset="0"/>
+                <a:ea typeface="Amiri" pitchFamily="2" charset="-78"/>
                 <a:cs typeface="Amiri" pitchFamily="2" charset="-78"/>
               </a:rPr>
               <a:t>وَأَلَّا أَشْرَبَ</a:t>
@@ -5162,6 +5197,7 @@
                   <a:srgbClr val="D4AF37"/>
                 </a:solidFill>
                 <a:latin typeface="Amiri" pitchFamily="2" charset="-78"/>
+                <a:ea typeface="Amiri" pitchFamily="2" charset="-78"/>
                 <a:cs typeface="Amiri" pitchFamily="2" charset="-78"/>
               </a:rPr>
               <a:t>م</a:t>
@@ -5482,6 +5518,7 @@
                   <a:srgbClr val="8A6D1E"/>
                 </a:solidFill>
                 <a:latin typeface="Amiri" pitchFamily="2" charset="-78"/>
+                <a:ea typeface="Amiri" pitchFamily="2" charset="-78"/>
                 <a:cs typeface="Amiri" pitchFamily="2" charset="-78"/>
               </a:rPr>
               <a:t>اخْتَرْ عُنْوَانًا وَاحِدًا</a:t>
@@ -5762,6 +5799,7 @@
                   <a:srgbClr val="1B3B6F"/>
                 </a:solidFill>
                 <a:latin typeface="Amiri" pitchFamily="2" charset="-78"/>
+                <a:ea typeface="Amiri" pitchFamily="2" charset="-78"/>
                 <a:cs typeface="Amiri" pitchFamily="2" charset="-78"/>
               </a:rPr>
               <a:t>زِيَارَةٌ إِلَى الطَّبِيبِ</a:t>
@@ -5800,6 +5838,7 @@
                   <a:srgbClr val="1B3B6F"/>
                 </a:solidFill>
                 <a:latin typeface="Amiri" pitchFamily="2" charset="-78"/>
+                <a:ea typeface="Amiri" pitchFamily="2" charset="-78"/>
                 <a:cs typeface="Amiri" pitchFamily="2" charset="-78"/>
               </a:rPr>
               <a:t>(أ)</a:t>
@@ -5906,6 +5945,7 @@
                   <a:srgbClr val="1B3B6F"/>
                 </a:solidFill>
                 <a:latin typeface="Amiri" pitchFamily="2" charset="-78"/>
+                <a:ea typeface="Amiri" pitchFamily="2" charset="-78"/>
                 <a:cs typeface="Amiri" pitchFamily="2" charset="-78"/>
               </a:rPr>
               <a:t>لِمَاذَا ذَهَبْتَ؟ · مَاذَا حَدَثَ فِي العِيَادَةِ؟ · الدَّوَاءُ وَالنَّصَائِحُ · مَاذَا تَعَلَّمْتَ؟ وَمَا خُطَطُكَ؟</a:t>
@@ -6037,6 +6077,7 @@
                   <a:srgbClr val="1B3B6F"/>
                 </a:solidFill>
                 <a:latin typeface="Amiri" pitchFamily="2" charset="-78"/>
+                <a:ea typeface="Amiri" pitchFamily="2" charset="-78"/>
                 <a:cs typeface="Amiri" pitchFamily="2" charset="-78"/>
               </a:rPr>
               <a:t>الدَّوَاءُ بِدُونِ اسْتِشَارَةٍ: خَطَرٌ أَمْ حَلٌّ سَرِيعٌ؟</a:t>
@@ -6075,6 +6116,7 @@
                   <a:srgbClr val="1B3B6F"/>
                 </a:solidFill>
                 <a:latin typeface="Amiri" pitchFamily="2" charset="-78"/>
+                <a:ea typeface="Amiri" pitchFamily="2" charset="-78"/>
                 <a:cs typeface="Amiri" pitchFamily="2" charset="-78"/>
               </a:rPr>
               <a:t>(ب)</a:t>
@@ -6181,6 +6223,7 @@
                   <a:srgbClr val="1B3B6F"/>
                 </a:solidFill>
                 <a:latin typeface="Amiri" pitchFamily="2" charset="-78"/>
+                <a:ea typeface="Amiri" pitchFamily="2" charset="-78"/>
                 <a:cs typeface="Amiri" pitchFamily="2" charset="-78"/>
               </a:rPr>
               <a:t>لِمَاذَا يَأْخُذُ النَّاسُ الدَّوَاءَ وَحْدَهُمْ؟ · دَوْرُ الطَّبِيبِ وَالصَّيْدَلِيِّ · تَجْرِبَةٌ تَعْرِفُهَا · رَأْيُكَ وَاقْتِرَاحَاتُكَ</a:t>
@@ -6380,6 +6423,7 @@
                   <a:srgbClr val="D4AF37"/>
                 </a:solidFill>
                 <a:latin typeface="Amiri" pitchFamily="2" charset="-78"/>
+                <a:ea typeface="Amiri" pitchFamily="2" charset="-78"/>
                 <a:cs typeface="Amiri" pitchFamily="2" charset="-78"/>
               </a:rPr>
               <a:t>م</a:t>
@@ -6700,6 +6744,7 @@
                   <a:srgbClr val="8A6D1E"/>
                 </a:solidFill>
                 <a:latin typeface="Amiri" pitchFamily="2" charset="-78"/>
+                <a:ea typeface="Amiri" pitchFamily="2" charset="-78"/>
                 <a:cs typeface="Amiri" pitchFamily="2" charset="-78"/>
               </a:rPr>
               <a:t>خُطَّةُ الكِتَابَةِ</a:t>
@@ -7324,6 +7369,7 @@
                   <a:srgbClr val="1B3B6F"/>
                 </a:solidFill>
                 <a:latin typeface="Amiri" pitchFamily="2" charset="-78"/>
+                <a:ea typeface="Amiri" pitchFamily="2" charset="-78"/>
                 <a:cs typeface="Amiri" pitchFamily="2" charset="-78"/>
               </a:rPr>
               <a:t>نَصَحَنِي الطَّبِيبُ بِأَنْ أَرْتَاحَ.</a:t>
@@ -7423,6 +7469,7 @@
                   <a:srgbClr val="1B3B6F"/>
                 </a:solidFill>
                 <a:latin typeface="Amiri" pitchFamily="2" charset="-78"/>
+                <a:ea typeface="Amiri" pitchFamily="2" charset="-78"/>
                 <a:cs typeface="Amiri" pitchFamily="2" charset="-78"/>
               </a:rPr>
               <a:t>آخُذُ الدَّوَاءَ مَرَّتَيْنِ فِي اليَوْمِ.</a:t>
@@ -7522,6 +7569,7 @@
                   <a:srgbClr val="1B3B6F"/>
                 </a:solidFill>
                 <a:latin typeface="Amiri" pitchFamily="2" charset="-78"/>
+                <a:ea typeface="Amiri" pitchFamily="2" charset="-78"/>
                 <a:cs typeface="Amiri" pitchFamily="2" charset="-78"/>
               </a:rPr>
               <a:t>سَأَقْرَأُ التَّعْلِيمَاتِ دَائِمًا.</a:t>
@@ -7683,6 +7731,7 @@
                   <a:srgbClr val="1F2A37"/>
                 </a:solidFill>
                 <a:latin typeface="Amiri" pitchFamily="2" charset="-78"/>
+                <a:ea typeface="Amiri" pitchFamily="2" charset="-78"/>
                 <a:cs typeface="Amiri" pitchFamily="2" charset="-78"/>
               </a:rPr>
               <a:t>أ</a:t>
@@ -7709,6 +7758,7 @@
                   <a:srgbClr val="1F2A37"/>
                 </a:solidFill>
                 <a:latin typeface="Amiri" pitchFamily="2" charset="-78"/>
+                <a:ea typeface="Amiri" pitchFamily="2" charset="-78"/>
                 <a:cs typeface="Amiri" pitchFamily="2" charset="-78"/>
               </a:rPr>
               <a:t>ب</a:t>
@@ -7855,6 +7905,7 @@
                   <a:srgbClr val="D4AF37"/>
                 </a:solidFill>
                 <a:latin typeface="Amiri" pitchFamily="2" charset="-78"/>
+                <a:ea typeface="Amiri" pitchFamily="2" charset="-78"/>
                 <a:cs typeface="Amiri" pitchFamily="2" charset="-78"/>
               </a:rPr>
               <a:t>م</a:t>
@@ -8112,6 +8163,7 @@
                   <a:srgbClr val="8A6D1E"/>
                 </a:solidFill>
                 <a:latin typeface="Amiri" pitchFamily="2" charset="-78"/>
+                <a:ea typeface="Amiri" pitchFamily="2" charset="-78"/>
                 <a:cs typeface="Amiri" pitchFamily="2" charset="-78"/>
               </a:rPr>
               <a:t>أ</a:t>
@@ -8176,6 +8228,7 @@
                   <a:srgbClr val="1B3B6F"/>
                 </a:solidFill>
                 <a:latin typeface="Amiri" pitchFamily="2" charset="-78"/>
+                <a:ea typeface="Amiri" pitchFamily="2" charset="-78"/>
                 <a:cs typeface="Amiri" pitchFamily="2" charset="-78"/>
               </a:rPr>
               <a:t>أ</a:t>
@@ -8227,6 +8280,7 @@
                   <a:srgbClr val="8A6D1E"/>
                 </a:solidFill>
                 <a:latin typeface="Amiri" pitchFamily="2" charset="-78"/>
+                <a:ea typeface="Amiri" pitchFamily="2" charset="-78"/>
                 <a:cs typeface="Amiri" pitchFamily="2" charset="-78"/>
               </a:rPr>
               <a:t>نَمُوذَجُ الإِجَابَةِ</a:t>
@@ -8340,6 +8394,7 @@
                   <a:srgbClr val="1F2A37"/>
                 </a:solidFill>
                 <a:latin typeface="Amiri" pitchFamily="2" charset="-78"/>
+                <a:ea typeface="Amiri" pitchFamily="2" charset="-78"/>
                 <a:cs typeface="Amiri" pitchFamily="2" charset="-78"/>
               </a:rPr>
               <a:t>فِي الأُسْبُوعِ المَاضِي كُنْتُ مَرِيضَةً. فِي يَوْمِ الثُّلَاثَاءِ اسْتَيْقَظْتُ، وَكَانَتْ أُذُنِي تُؤْلِمُنِي كَثِيرًا، وَكَانَ عِنْدِي صُدَاعٌ. لَمْ أَذْهَبْ إِلَى المَدْرَسَةِ، وَبَقِيتُ فِي السَّرِيرِ، لِأَنِّي كُنْتُ مُتْعَبَةً جِدًّا.</a:t>
@@ -8359,6 +8414,7 @@
                   <a:srgbClr val="1F2A37"/>
                 </a:solidFill>
                 <a:latin typeface="Amiri" pitchFamily="2" charset="-78"/>
+                <a:ea typeface="Amiri" pitchFamily="2" charset="-78"/>
                 <a:cs typeface="Amiri" pitchFamily="2" charset="-78"/>
               </a:rPr>
               <a:t>اتَّصَلَتْ أُمِّي بِالعِيَادَةِ، وَحَجَزَتْ مَوْعِدًا فِي السَّاعَةِ الحَادِيَةَ عَشْرَةَ. ذَهَبْنَا بِالسَّيَّارَةِ، وَانْتَظَرْنَا عِشْرِينَ دَقِيقَةً. الطَّبِيبَةُ كَانَتْ لَطِيفَةً جِدًّا. سَأَلَتْنِي: «مُنْذُ مَتَى تُؤْلِمُكِ أُذُنُكِ؟» قُلْتُ: «مُنْذُ يَوْمَيْنِ». فَحَصَتْنِي، وَكَتَبَتْ لِي وَصْفَةً.</a:t>
@@ -8378,6 +8434,7 @@
                   <a:srgbClr val="1F2A37"/>
                 </a:solidFill>
                 <a:latin typeface="Amiri" pitchFamily="2" charset="-78"/>
+                <a:ea typeface="Amiri" pitchFamily="2" charset="-78"/>
                 <a:cs typeface="Amiri" pitchFamily="2" charset="-78"/>
               </a:rPr>
               <a:t>بَعْدَ ذٰلِكَ ذَهَبْنَا إِلَى الصَّيْدَلِيَّةِ. أَعْطَانَا الصَّيْدَلِيُّ قَطْرَةً لِلْأُذُنِ وَحُبُوبًا لِلصُّدَاعِ. قَالَ: «خُذِي الحُبُوبَ مَرَّتَيْنِ فِي اليَوْمِ بَعْدَ الأَكْلِ». فِي البَيْتِ نِمْتُ كَثِيرًا، وَشَرِبْتُ الشَّايَ بِالعَسَلِ.</a:t>
@@ -8397,6 +8454,7 @@
                   <a:srgbClr val="1F2A37"/>
                 </a:solidFill>
                 <a:latin typeface="Amiri" pitchFamily="2" charset="-78"/>
+                <a:ea typeface="Amiri" pitchFamily="2" charset="-78"/>
                 <a:cs typeface="Amiri" pitchFamily="2" charset="-78"/>
               </a:rPr>
               <a:t>الآنَ أَنَا بِخَيْرٍ، وَالحَمْدُ لِلّٰهِ. فِي رَأْيِي، يَجِبُ أَنْ نَذْهَبَ إِلَى الطَّبِيبِ عِنْدَمَا نَمْرَضُ، وَأَنْ نَقْرَأَ تَعْلِيمَاتِ الدَّوَاءِ. فِي المُسْتَقْبَلِ أُرِيدُ أَنْ أَكُونَ طَبِيبَةً، لِأَنِّي أُحِبُّ أَنْ أُسَاعِدَ النَّاسَ.</a:t>
@@ -8560,11 +8618,12 @@
               <a:buNone/>
             </a:pPr>
             <a:r>
-              <a:rPr lang="en-US" sz="950" b="1" dirty="0">
+              <a:rPr lang="ar-SA" sz="950" b="1" dirty="0">
                 <a:solidFill>
                   <a:srgbClr val="FFFFFF"/>
                 </a:solidFill>
                 <a:latin typeface="Calibri" pitchFamily="34" charset="0"/>
+                <a:ea typeface="Amiri" pitchFamily="2" charset="-78"/>
                 <a:cs typeface="Amiri" pitchFamily="2" charset="-78"/>
               </a:rPr>
               <a:t>حَجَزَتْ مَوْعِدًا</a:t>
@@ -8625,11 +8684,12 @@
               <a:buNone/>
             </a:pPr>
             <a:r>
-              <a:rPr lang="en-US" sz="950" b="1" dirty="0">
+              <a:rPr lang="ar-SA" sz="950" b="1" dirty="0">
                 <a:solidFill>
                   <a:srgbClr val="FFFFFF"/>
                 </a:solidFill>
                 <a:latin typeface="Calibri" pitchFamily="34" charset="0"/>
+                <a:ea typeface="Amiri" pitchFamily="2" charset="-78"/>
                 <a:cs typeface="Amiri" pitchFamily="2" charset="-78"/>
               </a:rPr>
               <a:t>مُنْذُ يَوْمَيْنِ</a:t>
@@ -8690,11 +8750,12 @@
               <a:buNone/>
             </a:pPr>
             <a:r>
-              <a:rPr lang="en-US" sz="950" b="1" dirty="0">
+              <a:rPr lang="ar-SA" sz="950" b="1" dirty="0">
                 <a:solidFill>
                   <a:srgbClr val="FFFFFF"/>
                 </a:solidFill>
                 <a:latin typeface="Calibri" pitchFamily="34" charset="0"/>
+                <a:ea typeface="Amiri" pitchFamily="2" charset="-78"/>
                 <a:cs typeface="Amiri" pitchFamily="2" charset="-78"/>
               </a:rPr>
               <a:t>مَرَّتَيْنِ فِي اليَوْمِ</a:t>
@@ -8755,11 +8816,12 @@
               <a:buNone/>
             </a:pPr>
             <a:r>
-              <a:rPr lang="en-US" sz="950" b="1" dirty="0">
+              <a:rPr lang="ar-SA" sz="950" b="1" dirty="0">
                 <a:solidFill>
                   <a:srgbClr val="FFFFFF"/>
                 </a:solidFill>
                 <a:latin typeface="Calibri" pitchFamily="34" charset="0"/>
+                <a:ea typeface="Amiri" pitchFamily="2" charset="-78"/>
                 <a:cs typeface="Amiri" pitchFamily="2" charset="-78"/>
               </a:rPr>
               <a:t>يَجِبُ أَنْ نَذْهَبَ</a:t>
@@ -8893,6 +8955,7 @@
                   <a:srgbClr val="D4AF37"/>
                 </a:solidFill>
                 <a:latin typeface="Amiri" pitchFamily="2" charset="-78"/>
+                <a:ea typeface="Amiri" pitchFamily="2" charset="-78"/>
                 <a:cs typeface="Amiri" pitchFamily="2" charset="-78"/>
               </a:rPr>
               <a:t>م</a:t>
@@ -9150,6 +9213,7 @@
                   <a:srgbClr val="8A6D1E"/>
                 </a:solidFill>
                 <a:latin typeface="Amiri" pitchFamily="2" charset="-78"/>
+                <a:ea typeface="Amiri" pitchFamily="2" charset="-78"/>
                 <a:cs typeface="Amiri" pitchFamily="2" charset="-78"/>
               </a:rPr>
               <a:t>أ</a:t>
@@ -9214,6 +9278,7 @@
                   <a:srgbClr val="1B3B6F"/>
                 </a:solidFill>
                 <a:latin typeface="Amiri" pitchFamily="2" charset="-78"/>
+                <a:ea typeface="Amiri" pitchFamily="2" charset="-78"/>
                 <a:cs typeface="Amiri" pitchFamily="2" charset="-78"/>
               </a:rPr>
               <a:t>أ</a:t>
@@ -9265,6 +9330,7 @@
                   <a:srgbClr val="8A6D1E"/>
                 </a:solidFill>
                 <a:latin typeface="Amiri" pitchFamily="2" charset="-78"/>
+                <a:ea typeface="Amiri" pitchFamily="2" charset="-78"/>
                 <a:cs typeface="Amiri" pitchFamily="2" charset="-78"/>
               </a:rPr>
               <a:t>نَمُوذَجُ الإِجَابَةِ</a:t>
@@ -9378,6 +9444,7 @@
                   <a:srgbClr val="1F2A37"/>
                 </a:solidFill>
                 <a:latin typeface="Amiri" pitchFamily="2" charset="-78"/>
+                <a:ea typeface="Amiri" pitchFamily="2" charset="-78"/>
                 <a:cs typeface="Amiri" pitchFamily="2" charset="-78"/>
               </a:rPr>
               <a:t>لَمْ أَكُنْ أُحِبُّ زِيَارَةَ الطَّبِيبِ عِنْدَمَا كُنْتُ صَغِيرَةً، لٰكِنَّ زِيَارَتِي الأَخِيرَةَ غَيَّرَتْ رَأْيِي. فِي الشَّهْرِ المَاضِي، بَعْدَ أُسْبُوعٍ مِنَ السَّهَرِ لِلِامْتِحَانَاتِ، بَدَأْتُ أَشْعُرُ بِدُوَارٍ وَصُدَاعٍ مُسْتَمِرٍّ، فَحَجَزَتْ لِي أُمِّي مَوْعِدًا فِي العِيَادَةِ القَرِيبَةِ مِنْ بَيْتِنَا.</a:t>
@@ -9397,6 +9464,7 @@
                   <a:srgbClr val="1F2A37"/>
                 </a:solidFill>
                 <a:latin typeface="Amiri" pitchFamily="2" charset="-78"/>
+                <a:ea typeface="Amiri" pitchFamily="2" charset="-78"/>
                 <a:cs typeface="Amiri" pitchFamily="2" charset="-78"/>
               </a:rPr>
               <a:t>اسْتَقْبَلَتْنِي الطَّبِيبَةُ بِابْتِسَامَةٍ، وَسَأَلَتْنِي عَنْ نَوْمِي وَأَكْلِي، ثُمَّ فَحَصَتْنِي بِعِنَايَةٍ. قَالَتْ إِنَّ المُشْكِلَةَ لَيْسَتْ مَرَضًا، بَلْ قِلَّةُ النَّوْمِ وَالمَاءِ، وَنَصَحَتْنِي بِأَنْ أَنَامَ ثَمَانِيَ سَاعَاتٍ، وَأَلَّا أَشْرَبَ القَهْوَةَ فِي المَسَاءِ، وَأَنْ أُطْفِئَ الهَاتِفَ قَبْلَ النَّوْمِ بِسَاعَةٍ.</a:t>
@@ -9416,6 +9484,7 @@
                   <a:srgbClr val="1F2A37"/>
                 </a:solidFill>
                 <a:latin typeface="Amiri" pitchFamily="2" charset="-78"/>
+                <a:ea typeface="Amiri" pitchFamily="2" charset="-78"/>
                 <a:cs typeface="Amiri" pitchFamily="2" charset="-78"/>
               </a:rPr>
               <a:t>لَمْ تَكْتُبْ لِي أَدْوِيَةً كَثِيرَةً، بَلْ فِيتَامِينًا وَاحِدًا آخُذُهُ مَرَّةً فِي اليَوْمِ بَعْدَ الفُطُورِ. وَفِي الصَّيْدَلِيَّةِ شَرَحَ لِي الصَّيْدَلِيُّ التَّعْلِيمَاتِ بِوُضُوحٍ، وَنَبَّهَنِي إِلَى أَلَّا آخُذَهُ عَلَى مَعِدَةٍ فَارِغَةٍ، وَقَالَ إِنَّ النَّتِيجَةَ سَتَظْهَرُ بَعْدَ أُسْبُوعَيْنِ.</a:t>
@@ -9435,6 +9504,7 @@
                   <a:srgbClr val="1F2A37"/>
                 </a:solidFill>
                 <a:latin typeface="Amiri" pitchFamily="2" charset="-78"/>
+                <a:ea typeface="Amiri" pitchFamily="2" charset="-78"/>
                 <a:cs typeface="Amiri" pitchFamily="2" charset="-78"/>
               </a:rPr>
               <a:t>تَعَلَّمْتُ أَنَّ الطَّبِيبَ الجَيِّدَ يُعَالِجُ السَّبَبَ لَا الأَعْرَاضَ فَقَطْ. صَحِيحٌ أَنَّ تَغْيِيرَ عَادَاتِي كَانَ صَعْبًا، غَيْرَ أَنِّي أَشْعُرُ الآنَ بِنَشَاطٍ أَكْبَرَ. وَلَوْ سَأَلَنِي أَحَدٌ عَنْ أَهَمِّ نَصِيحَةٍ، لَقُلْتُ: النَّوْمُ أَوَّلًا.</a:t>
@@ -9533,11 +9603,12 @@
               <a:buNone/>
             </a:pPr>
             <a:r>
-              <a:rPr lang="en-US" sz="950" b="1" dirty="0">
+              <a:rPr lang="ar-SA" sz="950" b="1" dirty="0">
                 <a:solidFill>
                   <a:srgbClr val="FFFFFF"/>
                 </a:solidFill>
                 <a:latin typeface="Calibri" pitchFamily="34" charset="0"/>
+                <a:ea typeface="Amiri" pitchFamily="2" charset="-78"/>
                 <a:cs typeface="Amiri" pitchFamily="2" charset="-78"/>
               </a:rPr>
               <a:t>لَمْ أَكُنْ أُحِبُّ</a:t>
@@ -9598,11 +9669,12 @@
               <a:buNone/>
             </a:pPr>
             <a:r>
-              <a:rPr lang="en-US" sz="950" b="1" dirty="0">
+              <a:rPr lang="ar-SA" sz="950" b="1" dirty="0">
                 <a:solidFill>
                   <a:srgbClr val="FFFFFF"/>
                 </a:solidFill>
                 <a:latin typeface="Calibri" pitchFamily="34" charset="0"/>
+                <a:ea typeface="Amiri" pitchFamily="2" charset="-78"/>
                 <a:cs typeface="Amiri" pitchFamily="2" charset="-78"/>
               </a:rPr>
               <a:t>لَيْسَتْ مَرَضًا، بَلْ</a:t>
@@ -9663,11 +9735,12 @@
               <a:buNone/>
             </a:pPr>
             <a:r>
-              <a:rPr lang="en-US" sz="950" b="1" dirty="0">
+              <a:rPr lang="ar-SA" sz="950" b="1" dirty="0">
                 <a:solidFill>
                   <a:srgbClr val="FFFFFF"/>
                 </a:solidFill>
                 <a:latin typeface="Calibri" pitchFamily="34" charset="0"/>
+                <a:ea typeface="Amiri" pitchFamily="2" charset="-78"/>
                 <a:cs typeface="Amiri" pitchFamily="2" charset="-78"/>
               </a:rPr>
               <a:t>نَبَّهَنِي إِلَى أَلَّا</a:t>
@@ -9728,11 +9801,12 @@
               <a:buNone/>
             </a:pPr>
             <a:r>
-              <a:rPr lang="en-US" sz="950" b="1" dirty="0">
+              <a:rPr lang="ar-SA" sz="950" b="1" dirty="0">
                 <a:solidFill>
                   <a:srgbClr val="FFFFFF"/>
                 </a:solidFill>
                 <a:latin typeface="Calibri" pitchFamily="34" charset="0"/>
+                <a:ea typeface="Amiri" pitchFamily="2" charset="-78"/>
                 <a:cs typeface="Amiri" pitchFamily="2" charset="-78"/>
               </a:rPr>
               <a:t>لَوْ سَأَلَنِي … لَقُلْتُ</a:t>
@@ -9866,6 +9940,7 @@
                   <a:srgbClr val="D4AF37"/>
                 </a:solidFill>
                 <a:latin typeface="Amiri" pitchFamily="2" charset="-78"/>
+                <a:ea typeface="Amiri" pitchFamily="2" charset="-78"/>
                 <a:cs typeface="Amiri" pitchFamily="2" charset="-78"/>
               </a:rPr>
               <a:t>م</a:t>
@@ -10123,6 +10198,7 @@
                   <a:srgbClr val="8A6D1E"/>
                 </a:solidFill>
                 <a:latin typeface="Amiri" pitchFamily="2" charset="-78"/>
+                <a:ea typeface="Amiri" pitchFamily="2" charset="-78"/>
                 <a:cs typeface="Amiri" pitchFamily="2" charset="-78"/>
               </a:rPr>
               <a:t>ب</a:t>
@@ -10187,6 +10263,7 @@
                   <a:srgbClr val="1B3B6F"/>
                 </a:solidFill>
                 <a:latin typeface="Amiri" pitchFamily="2" charset="-78"/>
+                <a:ea typeface="Amiri" pitchFamily="2" charset="-78"/>
                 <a:cs typeface="Amiri" pitchFamily="2" charset="-78"/>
               </a:rPr>
               <a:t>ب</a:t>
@@ -10238,6 +10315,7 @@
                   <a:srgbClr val="8A6D1E"/>
                 </a:solidFill>
                 <a:latin typeface="Amiri" pitchFamily="2" charset="-78"/>
+                <a:ea typeface="Amiri" pitchFamily="2" charset="-78"/>
                 <a:cs typeface="Amiri" pitchFamily="2" charset="-78"/>
               </a:rPr>
               <a:t>نَمُوذَجُ الإِجَابَةِ</a:t>
@@ -10351,6 +10429,7 @@
                   <a:srgbClr val="1F2A37"/>
                 </a:solidFill>
                 <a:latin typeface="Amiri" pitchFamily="2" charset="-78"/>
+                <a:ea typeface="Amiri" pitchFamily="2" charset="-78"/>
                 <a:cs typeface="Amiri" pitchFamily="2" charset="-78"/>
               </a:rPr>
               <a:t>صَارَ كَثِيرٌ مِنَ النَّاسِ اليَوْمَ يَأْخُذُونَ الدَّوَاءَ دُونَ أَنْ يَسْتَشِيرُوا الطَّبِيبَ؛ فَإِذَا شَعَرُوا بِصُدَاعٍ بَسِيطٍ أَخَذُوا مُسَكِّنًا، وَإِذَا أُصِيبُوا بِزُكَامٍ اشْتَرَوْا مُضَادًّا حَيَوِيًّا مِنَ الصَّيْدَلِيَّةِ. وَيَقُولُونَ إِنَّ ذٰلِكَ أَسْرَعُ وَأَرْخَصُ مِنْ زِيَارَةِ الطَّبِيبِ، خُصُوصًا عِنْدَمَا تَكُونُ العِيَادَاتُ مُزْدَحِمَةً.</a:t>
@@ -10370,6 +10449,7 @@
                   <a:srgbClr val="1F2A37"/>
                 </a:solidFill>
                 <a:latin typeface="Amiri" pitchFamily="2" charset="-78"/>
+                <a:ea typeface="Amiri" pitchFamily="2" charset="-78"/>
                 <a:cs typeface="Amiri" pitchFamily="2" charset="-78"/>
               </a:rPr>
               <a:t>فِي رَأْيِي، هٰذِهِ عَادَةٌ خَطِيرَةٌ، لِأَنَّ لِكُلِّ دَوَاءٍ آثَارًا جَانِبِيَّةً، وَلِأَنَّ المُضَادَّاتِ الحَيَوِيَّةَ لَا تُفِيدُ ضِدَّ الفَيْرُوسَاتِ. أَمَّا الطَّبِيبُ فَيَعْرِفُ تَارِيخَ المَرِيضِ، وَيَخْتَارُ الدَّوَاءَ المُنَاسِبَ وَالجُرْعَةَ الصَّحِيحَةَ، وَيُتَابِعُ حَالَتَهُ حَتَّى يُشْفَى.</a:t>
@@ -10389,6 +10469,7 @@
                   <a:srgbClr val="1F2A37"/>
                 </a:solidFill>
                 <a:latin typeface="Amiri" pitchFamily="2" charset="-78"/>
+                <a:ea typeface="Amiri" pitchFamily="2" charset="-78"/>
                 <a:cs typeface="Amiri" pitchFamily="2" charset="-78"/>
               </a:rPr>
               <a:t>فِي السَّنَةِ المَاضِيَةِ أَخَذَ أَخِي دَوَاءً لِصَدِيقِهِ عِنْدَمَا كَانَ مَرِيضًا، فَأُصِيبَ بَعْدَ سَاعَةٍ وَاحِدَةٍ بِحَسَاسِيَّةٍ شَدِيدَةٍ، وَاضْطُرَّ إِلَى الذَّهَابِ إِلَى المُسْتَشْفَى. مُنْذُ ذٰلِكَ اليَوْمِ تَعَلَّمَتْ أُسْرَتِي كُلُّهَا أَنْ تَقْرَأَ التَّعْلِيمَاتِ وَأَنْ تَسْأَلَ الصَّيْدَلِيَّ دَائِمًا.</a:t>
@@ -10408,6 +10489,7 @@
                   <a:srgbClr val="1F2A37"/>
                 </a:solidFill>
                 <a:latin typeface="Amiri" pitchFamily="2" charset="-78"/>
+                <a:ea typeface="Amiri" pitchFamily="2" charset="-78"/>
                 <a:cs typeface="Amiri" pitchFamily="2" charset="-78"/>
               </a:rPr>
               <a:t>صَحِيحٌ أَنَّ زِيَارَةَ الطَّبِيبِ تَأْخُذُ وَقْتًا، غَيْرَ أَنَّهَا أَكْثَرُ أَمَانًا. لِذٰلِكَ أَقْتَرِحُ أَنْ تُنَظِّمَ المَدَارِسُ دُرُوسًا عَنِ الاسْتِعْمَالِ الصَّحِيحِ لِلْأَدْوِيَةِ، وَلَوْ فَعَلَتْ ذٰلِكَ، لَقَلَّتِ الأَخْطَاءُ كَثِيرًا، وَلَحَمَيْنَا صِحَّةَ أُسَرِنَا.</a:t>
@@ -10506,11 +10588,12 @@
               <a:buNone/>
             </a:pPr>
             <a:r>
-              <a:rPr lang="en-US" sz="950" b="1" dirty="0">
+              <a:rPr lang="ar-SA" sz="950" b="1" dirty="0">
                 <a:solidFill>
                   <a:srgbClr val="FFFFFF"/>
                 </a:solidFill>
                 <a:latin typeface="Calibri" pitchFamily="34" charset="0"/>
+                <a:ea typeface="Amiri" pitchFamily="2" charset="-78"/>
                 <a:cs typeface="Amiri" pitchFamily="2" charset="-78"/>
               </a:rPr>
               <a:t>دُونَ أَنْ يَسْتَشِيرُوا</a:t>
@@ -10571,11 +10654,12 @@
               <a:buNone/>
             </a:pPr>
             <a:r>
-              <a:rPr lang="en-US" sz="950" b="1" dirty="0">
+              <a:rPr lang="ar-SA" sz="950" b="1" dirty="0">
                 <a:solidFill>
                   <a:srgbClr val="FFFFFF"/>
                 </a:solidFill>
                 <a:latin typeface="Calibri" pitchFamily="34" charset="0"/>
+                <a:ea typeface="Amiri" pitchFamily="2" charset="-78"/>
                 <a:cs typeface="Amiri" pitchFamily="2" charset="-78"/>
               </a:rPr>
               <a:t>أَمَّا الطَّبِيبُ فَيَعْرِفُ</a:t>
@@ -10636,11 +10720,12 @@
               <a:buNone/>
             </a:pPr>
             <a:r>
-              <a:rPr lang="en-US" sz="950" b="1" dirty="0">
+              <a:rPr lang="ar-SA" sz="950" b="1" dirty="0">
                 <a:solidFill>
                   <a:srgbClr val="FFFFFF"/>
                 </a:solidFill>
                 <a:latin typeface="Calibri" pitchFamily="34" charset="0"/>
+                <a:ea typeface="Amiri" pitchFamily="2" charset="-78"/>
                 <a:cs typeface="Amiri" pitchFamily="2" charset="-78"/>
               </a:rPr>
               <a:t>وَاضْطُرَّ إِلَى</a:t>
@@ -10701,11 +10786,12 @@
               <a:buNone/>
             </a:pPr>
             <a:r>
-              <a:rPr lang="en-US" sz="950" b="1" dirty="0">
+              <a:rPr lang="ar-SA" sz="950" b="1" dirty="0">
                 <a:solidFill>
                   <a:srgbClr val="FFFFFF"/>
                 </a:solidFill>
                 <a:latin typeface="Calibri" pitchFamily="34" charset="0"/>
+                <a:ea typeface="Amiri" pitchFamily="2" charset="-78"/>
                 <a:cs typeface="Amiri" pitchFamily="2" charset="-78"/>
               </a:rPr>
               <a:t>لَوْ فَعَلَتْ … لَقَلَّتِ</a:t>
@@ -10839,6 +10925,7 @@
                   <a:srgbClr val="D4AF37"/>
                 </a:solidFill>
                 <a:latin typeface="Amiri" pitchFamily="2" charset="-78"/>
+                <a:ea typeface="Amiri" pitchFamily="2" charset="-78"/>
                 <a:cs typeface="Amiri" pitchFamily="2" charset="-78"/>
               </a:rPr>
               <a:t>م</a:t>
@@ -11159,6 +11246,7 @@
                   <a:srgbClr val="8A6D1E"/>
                 </a:solidFill>
                 <a:latin typeface="Amiri" pitchFamily="2" charset="-78"/>
+                <a:ea typeface="Amiri" pitchFamily="2" charset="-78"/>
                 <a:cs typeface="Amiri" pitchFamily="2" charset="-78"/>
               </a:rPr>
               <a:t>قَيِّمْ عَمَلَكَ</a:t>
@@ -12403,6 +12491,7 @@
                   <a:srgbClr val="FFFFFF"/>
                 </a:solidFill>
                 <a:latin typeface="Amiri" pitchFamily="2" charset="-78"/>
+                <a:ea typeface="Amiri" pitchFamily="2" charset="-78"/>
                 <a:cs typeface="Amiri" pitchFamily="2" charset="-78"/>
               </a:rPr>
               <a:t>أَحْسَنْتُمْ! إِلَى اللِّقَاءِ</a:t>
@@ -12555,6 +12644,7 @@
                   <a:srgbClr val="D4AF37"/>
                 </a:solidFill>
                 <a:latin typeface="Amiri" pitchFamily="2" charset="-78"/>
+                <a:ea typeface="Amiri" pitchFamily="2" charset="-78"/>
                 <a:cs typeface="Amiri" pitchFamily="2" charset="-78"/>
               </a:rPr>
               <a:t>وَرْشَةُ التَّدْرِيبِ</a:t>
@@ -12688,6 +12778,7 @@
                   <a:srgbClr val="D4AF37"/>
                 </a:solidFill>
                 <a:latin typeface="Amiri" pitchFamily="2" charset="-78"/>
+                <a:ea typeface="Amiri" pitchFamily="2" charset="-78"/>
                 <a:cs typeface="Amiri" pitchFamily="2" charset="-78"/>
               </a:rPr>
               <a:t>م</a:t>
@@ -13008,6 +13099,7 @@
                   <a:srgbClr val="8A6D1E"/>
                 </a:solidFill>
                 <a:latin typeface="Amiri" pitchFamily="2" charset="-78"/>
+                <a:ea typeface="Amiri" pitchFamily="2" charset="-78"/>
                 <a:cs typeface="Amiri" pitchFamily="2" charset="-78"/>
               </a:rPr>
               <a:t>آدَابُ الصَّفِّ</a:t>
@@ -14539,6 +14631,7 @@
                   <a:srgbClr val="D4AF37"/>
                 </a:solidFill>
                 <a:latin typeface="Amiri" pitchFamily="2" charset="-78"/>
+                <a:ea typeface="Amiri" pitchFamily="2" charset="-78"/>
                 <a:cs typeface="Amiri" pitchFamily="2" charset="-78"/>
               </a:rPr>
               <a:t>م</a:t>
@@ -14859,6 +14952,7 @@
                   <a:srgbClr val="8A6D1E"/>
                 </a:solidFill>
                 <a:latin typeface="Amiri" pitchFamily="2" charset="-78"/>
+                <a:ea typeface="Amiri" pitchFamily="2" charset="-78"/>
                 <a:cs typeface="Amiri" pitchFamily="2" charset="-78"/>
               </a:rPr>
               <a:t>خَرِيطَةُ الوَرْشَةِ</a:t>
@@ -15173,6 +15267,7 @@
                   <a:srgbClr val="1B3B6F"/>
                 </a:solidFill>
                 <a:latin typeface="Amiri" pitchFamily="2" charset="-78"/>
+                <a:ea typeface="Amiri" pitchFamily="2" charset="-78"/>
                 <a:cs typeface="Amiri" pitchFamily="2" charset="-78"/>
               </a:rPr>
               <a:t>كَيْفَ</a:t>
@@ -15449,6 +15544,7 @@
                   <a:srgbClr val="1E6B52"/>
                 </a:solidFill>
                 <a:latin typeface="Amiri" pitchFamily="2" charset="-78"/>
+                <a:ea typeface="Amiri" pitchFamily="2" charset="-78"/>
                 <a:cs typeface="Amiri" pitchFamily="2" charset="-78"/>
               </a:rPr>
               <a:t>الاسْتِمَارَةُ</a:t>
@@ -15725,6 +15821,7 @@
                   <a:srgbClr val="1E6B52"/>
                 </a:solidFill>
                 <a:latin typeface="Amiri" pitchFamily="2" charset="-78"/>
+                <a:ea typeface="Amiri" pitchFamily="2" charset="-78"/>
                 <a:cs typeface="Amiri" pitchFamily="2" charset="-78"/>
               </a:rPr>
               <a:t>الرِّسَالَةُ</a:t>
@@ -16001,6 +16098,7 @@
                   <a:srgbClr val="1E6B52"/>
                 </a:solidFill>
                 <a:latin typeface="Amiri" pitchFamily="2" charset="-78"/>
+                <a:ea typeface="Amiri" pitchFamily="2" charset="-78"/>
                 <a:cs typeface="Amiri" pitchFamily="2" charset="-78"/>
               </a:rPr>
               <a:t>المَقَالُ</a:t>
@@ -16277,6 +16375,7 @@
                   <a:srgbClr val="8A6D1E"/>
                 </a:solidFill>
                 <a:latin typeface="Amiri" pitchFamily="2" charset="-78"/>
+                <a:ea typeface="Amiri" pitchFamily="2" charset="-78"/>
                 <a:cs typeface="Amiri" pitchFamily="2" charset="-78"/>
               </a:rPr>
               <a:t>قَيِّمْ</a:t>
@@ -16520,6 +16619,7 @@
                   <a:srgbClr val="D4AF37"/>
                 </a:solidFill>
                 <a:latin typeface="Amiri" pitchFamily="2" charset="-78"/>
+                <a:ea typeface="Amiri" pitchFamily="2" charset="-78"/>
                 <a:cs typeface="Amiri" pitchFamily="2" charset="-78"/>
               </a:rPr>
               <a:t>م</a:t>
@@ -16840,6 +16940,7 @@
                   <a:srgbClr val="8A6D1E"/>
                 </a:solidFill>
                 <a:latin typeface="Amiri" pitchFamily="2" charset="-78"/>
+                <a:ea typeface="Amiri" pitchFamily="2" charset="-78"/>
                 <a:cs typeface="Amiri" pitchFamily="2" charset="-78"/>
               </a:rPr>
               <a:t>امْتِحَانُ الكِتَابَةِ</a:t>
@@ -17464,6 +17565,7 @@
                   <a:srgbClr val="1B3B6F"/>
                 </a:solidFill>
                 <a:latin typeface="Amiri" pitchFamily="2" charset="-78"/>
+                <a:ea typeface="Amiri" pitchFamily="2" charset="-78"/>
                 <a:cs typeface="Amiri" pitchFamily="2" charset="-78"/>
               </a:rPr>
               <a:t>نَصَحَنِي الطَّبِيبُ بِأَنْ أَرْتَاحَ</a:t>
@@ -17563,6 +17665,7 @@
                   <a:srgbClr val="1B3B6F"/>
                 </a:solidFill>
                 <a:latin typeface="Amiri" pitchFamily="2" charset="-78"/>
+                <a:ea typeface="Amiri" pitchFamily="2" charset="-78"/>
                 <a:cs typeface="Amiri" pitchFamily="2" charset="-78"/>
               </a:rPr>
               <a:t>وَأَلَّا أَشْرَبَ المَشْرُوبَاتِ البَارِدَةَ</a:t>
@@ -17662,6 +17765,7 @@
                   <a:srgbClr val="1B3B6F"/>
                 </a:solidFill>
                 <a:latin typeface="Amiri" pitchFamily="2" charset="-78"/>
+                <a:ea typeface="Amiri" pitchFamily="2" charset="-78"/>
                 <a:cs typeface="Amiri" pitchFamily="2" charset="-78"/>
               </a:rPr>
               <a:t>آخُذُ حَبَّةً مَرَّتَيْنِ فِي اليَوْمِ بَعْدَ الأَكْلِ</a:t>
@@ -17833,6 +17937,7 @@
                   <a:srgbClr val="D4AF37"/>
                 </a:solidFill>
                 <a:latin typeface="Amiri" pitchFamily="2" charset="-78"/>
+                <a:ea typeface="Amiri" pitchFamily="2" charset="-78"/>
                 <a:cs typeface="Amiri" pitchFamily="2" charset="-78"/>
               </a:rPr>
               <a:t>م</a:t>
@@ -18153,6 +18258,7 @@
                   <a:srgbClr val="8A6D1E"/>
                 </a:solidFill>
                 <a:latin typeface="Amiri" pitchFamily="2" charset="-78"/>
+                <a:ea typeface="Amiri" pitchFamily="2" charset="-78"/>
                 <a:cs typeface="Amiri" pitchFamily="2" charset="-78"/>
               </a:rPr>
               <a:t>اسْتِمَارَةُ الصَّيْدَلِيَّةِ</a:t>
@@ -18509,6 +18615,7 @@
                   <a:srgbClr val="1B3B6F"/>
                 </a:solidFill>
                 <a:latin typeface="Amiri" pitchFamily="2" charset="-78"/>
+                <a:ea typeface="Amiri" pitchFamily="2" charset="-78"/>
                 <a:cs typeface="Amiri" pitchFamily="2" charset="-78"/>
               </a:rPr>
               <a:t>اسْمُ المَرِيضِ</a:t>
@@ -18753,6 +18860,7 @@
                   <a:srgbClr val="1B3B6F"/>
                 </a:solidFill>
                 <a:latin typeface="Amiri" pitchFamily="2" charset="-78"/>
+                <a:ea typeface="Amiri" pitchFamily="2" charset="-78"/>
                 <a:cs typeface="Amiri" pitchFamily="2" charset="-78"/>
               </a:rPr>
               <a:t>العُمْرُ</a:t>
@@ -18997,6 +19105,7 @@
                   <a:srgbClr val="1B3B6F"/>
                 </a:solidFill>
                 <a:latin typeface="Amiri" pitchFamily="2" charset="-78"/>
+                <a:ea typeface="Amiri" pitchFamily="2" charset="-78"/>
                 <a:cs typeface="Amiri" pitchFamily="2" charset="-78"/>
               </a:rPr>
               <a:t>المُشْكِلَةُ</a:t>
@@ -19241,6 +19350,7 @@
                   <a:srgbClr val="1B3B6F"/>
                 </a:solidFill>
                 <a:latin typeface="Amiri" pitchFamily="2" charset="-78"/>
+                <a:ea typeface="Amiri" pitchFamily="2" charset="-78"/>
                 <a:cs typeface="Amiri" pitchFamily="2" charset="-78"/>
               </a:rPr>
               <a:t>اسْمُ الطَّبِيبِ</a:t>
@@ -19485,6 +19595,7 @@
                   <a:srgbClr val="1B3B6F"/>
                 </a:solidFill>
                 <a:latin typeface="Amiri" pitchFamily="2" charset="-78"/>
+                <a:ea typeface="Amiri" pitchFamily="2" charset="-78"/>
                 <a:cs typeface="Amiri" pitchFamily="2" charset="-78"/>
               </a:rPr>
               <a:t>نَوْعُ الدَّوَاءِ</a:t>
@@ -19729,6 +19840,7 @@
                   <a:srgbClr val="1B3B6F"/>
                 </a:solidFill>
                 <a:latin typeface="Amiri" pitchFamily="2" charset="-78"/>
+                <a:ea typeface="Amiri" pitchFamily="2" charset="-78"/>
                 <a:cs typeface="Amiri" pitchFamily="2" charset="-78"/>
               </a:rPr>
               <a:t>كَمْ مَرَّةً فِي اليَوْمِ؟</a:t>
@@ -19973,6 +20085,7 @@
                   <a:srgbClr val="1B3B6F"/>
                 </a:solidFill>
                 <a:latin typeface="Amiri" pitchFamily="2" charset="-78"/>
+                <a:ea typeface="Amiri" pitchFamily="2" charset="-78"/>
                 <a:cs typeface="Amiri" pitchFamily="2" charset="-78"/>
               </a:rPr>
               <a:t>قَبْلَ الأَكْلِ أَمْ بَعْدَهُ؟</a:t>
@@ -20152,6 +20265,7 @@
                   <a:srgbClr val="1B3B6F"/>
                 </a:solidFill>
                 <a:latin typeface="Amiri" pitchFamily="2" charset="-78"/>
+                <a:ea typeface="Amiri" pitchFamily="2" charset="-78"/>
                 <a:cs typeface="Amiri" pitchFamily="2" charset="-78"/>
               </a:rPr>
               <a:t>جُمْلَةٌ: مَا نَصِيحَةُ الطَّبِيبِ؟</a:t>
@@ -20361,6 +20475,7 @@
                   <a:srgbClr val="D4AF37"/>
                 </a:solidFill>
                 <a:latin typeface="Amiri" pitchFamily="2" charset="-78"/>
+                <a:ea typeface="Amiri" pitchFamily="2" charset="-78"/>
                 <a:cs typeface="Amiri" pitchFamily="2" charset="-78"/>
               </a:rPr>
               <a:t>م</a:t>
@@ -20681,6 +20796,7 @@
                   <a:srgbClr val="8A6D1E"/>
                 </a:solidFill>
                 <a:latin typeface="Amiri" pitchFamily="2" charset="-78"/>
+                <a:ea typeface="Amiri" pitchFamily="2" charset="-78"/>
                 <a:cs typeface="Amiri" pitchFamily="2" charset="-78"/>
               </a:rPr>
               <a:t>نَمُوذَجُ الإِجَابَةِ</a:t>
@@ -20999,6 +21115,7 @@
                   <a:srgbClr val="1B3B6F"/>
                 </a:solidFill>
                 <a:latin typeface="Amiri" pitchFamily="2" charset="-78"/>
+                <a:ea typeface="Amiri" pitchFamily="2" charset="-78"/>
                 <a:cs typeface="Amiri" pitchFamily="2" charset="-78"/>
               </a:rPr>
               <a:t>مَرْيَمُ أَحْمَدُ</a:t>
@@ -21037,6 +21154,7 @@
                   <a:srgbClr val="1B3B6F"/>
                 </a:solidFill>
                 <a:latin typeface="Amiri" pitchFamily="2" charset="-78"/>
+                <a:ea typeface="Amiri" pitchFamily="2" charset="-78"/>
                 <a:cs typeface="Amiri" pitchFamily="2" charset="-78"/>
               </a:rPr>
               <a:t>اسْمُ المَرِيضِ</a:t>
@@ -21178,6 +21296,7 @@
                   <a:srgbClr val="1B3B6F"/>
                 </a:solidFill>
                 <a:latin typeface="Amiri" pitchFamily="2" charset="-78"/>
+                <a:ea typeface="Amiri" pitchFamily="2" charset="-78"/>
                 <a:cs typeface="Amiri" pitchFamily="2" charset="-78"/>
               </a:rPr>
               <a:t>أَرْبَعَ عَشْرَةَ سَنَةً</a:t>
@@ -21216,6 +21335,7 @@
                   <a:srgbClr val="1B3B6F"/>
                 </a:solidFill>
                 <a:latin typeface="Amiri" pitchFamily="2" charset="-78"/>
+                <a:ea typeface="Amiri" pitchFamily="2" charset="-78"/>
                 <a:cs typeface="Amiri" pitchFamily="2" charset="-78"/>
               </a:rPr>
               <a:t>العُمْرُ</a:t>
@@ -21357,6 +21477,7 @@
                   <a:srgbClr val="1B3B6F"/>
                 </a:solidFill>
                 <a:latin typeface="Amiri" pitchFamily="2" charset="-78"/>
+                <a:ea typeface="Amiri" pitchFamily="2" charset="-78"/>
                 <a:cs typeface="Amiri" pitchFamily="2" charset="-78"/>
               </a:rPr>
               <a:t>التِهَابٌ فِي الحَلْقِ</a:t>
@@ -21395,6 +21516,7 @@
                   <a:srgbClr val="1B3B6F"/>
                 </a:solidFill>
                 <a:latin typeface="Amiri" pitchFamily="2" charset="-78"/>
+                <a:ea typeface="Amiri" pitchFamily="2" charset="-78"/>
                 <a:cs typeface="Amiri" pitchFamily="2" charset="-78"/>
               </a:rPr>
               <a:t>المُشْكِلَةُ</a:t>
@@ -21536,6 +21658,7 @@
                   <a:srgbClr val="1B3B6F"/>
                 </a:solidFill>
                 <a:latin typeface="Amiri" pitchFamily="2" charset="-78"/>
+                <a:ea typeface="Amiri" pitchFamily="2" charset="-78"/>
                 <a:cs typeface="Amiri" pitchFamily="2" charset="-78"/>
               </a:rPr>
               <a:t>الدُّكْتُورَةُ سَلْمَى</a:t>
@@ -21574,6 +21697,7 @@
                   <a:srgbClr val="1B3B6F"/>
                 </a:solidFill>
                 <a:latin typeface="Amiri" pitchFamily="2" charset="-78"/>
+                <a:ea typeface="Amiri" pitchFamily="2" charset="-78"/>
                 <a:cs typeface="Amiri" pitchFamily="2" charset="-78"/>
               </a:rPr>
               <a:t>اسْمُ الطَّبِيبِ</a:t>
@@ -21715,6 +21839,7 @@
                   <a:srgbClr val="1B3B6F"/>
                 </a:solidFill>
                 <a:latin typeface="Amiri" pitchFamily="2" charset="-78"/>
+                <a:ea typeface="Amiri" pitchFamily="2" charset="-78"/>
                 <a:cs typeface="Amiri" pitchFamily="2" charset="-78"/>
               </a:rPr>
               <a:t>شَرَابٌ</a:t>
@@ -21753,6 +21878,7 @@
                   <a:srgbClr val="1B3B6F"/>
                 </a:solidFill>
                 <a:latin typeface="Amiri" pitchFamily="2" charset="-78"/>
+                <a:ea typeface="Amiri" pitchFamily="2" charset="-78"/>
                 <a:cs typeface="Amiri" pitchFamily="2" charset="-78"/>
               </a:rPr>
               <a:t>نَوْعُ الدَّوَاءِ</a:t>
@@ -21894,6 +22020,7 @@
                   <a:srgbClr val="1B3B6F"/>
                 </a:solidFill>
                 <a:latin typeface="Amiri" pitchFamily="2" charset="-78"/>
+                <a:ea typeface="Amiri" pitchFamily="2" charset="-78"/>
                 <a:cs typeface="Amiri" pitchFamily="2" charset="-78"/>
               </a:rPr>
               <a:t>ثَلَاثَ مَرَّاتٍ</a:t>
@@ -21932,6 +22059,7 @@
                   <a:srgbClr val="1B3B6F"/>
                 </a:solidFill>
                 <a:latin typeface="Amiri" pitchFamily="2" charset="-78"/>
+                <a:ea typeface="Amiri" pitchFamily="2" charset="-78"/>
                 <a:cs typeface="Amiri" pitchFamily="2" charset="-78"/>
               </a:rPr>
               <a:t>كَمْ مَرَّةً فِي اليَوْمِ؟</a:t>
@@ -22073,6 +22201,7 @@
                   <a:srgbClr val="1B3B6F"/>
                 </a:solidFill>
                 <a:latin typeface="Amiri" pitchFamily="2" charset="-78"/>
+                <a:ea typeface="Amiri" pitchFamily="2" charset="-78"/>
                 <a:cs typeface="Amiri" pitchFamily="2" charset="-78"/>
               </a:rPr>
               <a:t>بَعْدَ الأَكْلِ</a:t>
@@ -22111,6 +22240,7 @@
                   <a:srgbClr val="1B3B6F"/>
                 </a:solidFill>
                 <a:latin typeface="Amiri" pitchFamily="2" charset="-78"/>
+                <a:ea typeface="Amiri" pitchFamily="2" charset="-78"/>
                 <a:cs typeface="Amiri" pitchFamily="2" charset="-78"/>
               </a:rPr>
               <a:t>قَبْلَ الأَكْلِ أَمْ بَعْدَهُ؟</a:t>
@@ -22252,6 +22382,7 @@
                   <a:srgbClr val="1B3B6F"/>
                 </a:solidFill>
                 <a:latin typeface="Amiri" pitchFamily="2" charset="-78"/>
+                <a:ea typeface="Amiri" pitchFamily="2" charset="-78"/>
                 <a:cs typeface="Amiri" pitchFamily="2" charset="-78"/>
               </a:rPr>
               <a:t>نَصَحَتْنِي بِأَنْ أَرْتَاحَ وَأَلَّا أَشْرَبَ المَاءَ البَارِدَ.</a:t>
@@ -22290,6 +22421,7 @@
                   <a:srgbClr val="1B3B6F"/>
                 </a:solidFill>
                 <a:latin typeface="Amiri" pitchFamily="2" charset="-78"/>
+                <a:ea typeface="Amiri" pitchFamily="2" charset="-78"/>
                 <a:cs typeface="Amiri" pitchFamily="2" charset="-78"/>
               </a:rPr>
               <a:t>جُمْلَةٌ: مَا نَصِيحَةُ الطَّبِيبِ؟</a:t>
@@ -22499,6 +22631,7 @@
                   <a:srgbClr val="D4AF37"/>
                 </a:solidFill>
                 <a:latin typeface="Amiri" pitchFamily="2" charset="-78"/>
+                <a:ea typeface="Amiri" pitchFamily="2" charset="-78"/>
                 <a:cs typeface="Amiri" pitchFamily="2" charset="-78"/>
               </a:rPr>
               <a:t>م</a:t>
@@ -22819,6 +22952,7 @@
                   <a:srgbClr val="8A6D1E"/>
                 </a:solidFill>
                 <a:latin typeface="Amiri" pitchFamily="2" charset="-78"/>
+                <a:ea typeface="Amiri" pitchFamily="2" charset="-78"/>
                 <a:cs typeface="Amiri" pitchFamily="2" charset="-78"/>
               </a:rPr>
               <a:t>رِسَالَةٌ عَنْ زِيَارَةِ الطَّبِيبِ</a:t>
@@ -23294,6 +23428,7 @@
                   <a:srgbClr val="1B3B6F"/>
                 </a:solidFill>
                 <a:latin typeface="Amiri" pitchFamily="2" charset="-78"/>
+                <a:ea typeface="Amiri" pitchFamily="2" charset="-78"/>
                 <a:cs typeface="Amiri" pitchFamily="2" charset="-78"/>
               </a:rPr>
               <a:t>ذَهَبْتُ إِلَى الطَّبِيبِ لِأَنَّ …</a:t>
@@ -23370,6 +23505,7 @@
                   <a:srgbClr val="1B3B6F"/>
                 </a:solidFill>
                 <a:latin typeface="Amiri" pitchFamily="2" charset="-78"/>
+                <a:ea typeface="Amiri" pitchFamily="2" charset="-78"/>
                 <a:cs typeface="Amiri" pitchFamily="2" charset="-78"/>
               </a:rPr>
               <a:t>فَحَصَنِي وَقَالَ إِنَّ …</a:t>
@@ -23446,6 +23582,7 @@
                   <a:srgbClr val="1B3B6F"/>
                 </a:solidFill>
                 <a:latin typeface="Amiri" pitchFamily="2" charset="-78"/>
+                <a:ea typeface="Amiri" pitchFamily="2" charset="-78"/>
                 <a:cs typeface="Amiri" pitchFamily="2" charset="-78"/>
               </a:rPr>
               <a:t>آخُذُ … مَرَّتَيْنِ فِي اليَوْمِ</a:t>
@@ -23522,6 +23659,7 @@
                   <a:srgbClr val="1B3B6F"/>
                 </a:solidFill>
                 <a:latin typeface="Amiri" pitchFamily="2" charset="-78"/>
+                <a:ea typeface="Amiri" pitchFamily="2" charset="-78"/>
                 <a:cs typeface="Amiri" pitchFamily="2" charset="-78"/>
               </a:rPr>
               <a:t>نَصَحَنِي بِأَنْ … وَأَلَّا …</a:t>
@@ -23693,6 +23831,7 @@
                   <a:srgbClr val="D4AF37"/>
                 </a:solidFill>
                 <a:latin typeface="Amiri" pitchFamily="2" charset="-78"/>
+                <a:ea typeface="Amiri" pitchFamily="2" charset="-78"/>
                 <a:cs typeface="Amiri" pitchFamily="2" charset="-78"/>
               </a:rPr>
               <a:t>م</a:t>
@@ -24013,6 +24152,7 @@
                   <a:srgbClr val="8A6D1E"/>
                 </a:solidFill>
                 <a:latin typeface="Amiri" pitchFamily="2" charset="-78"/>
+                <a:ea typeface="Amiri" pitchFamily="2" charset="-78"/>
                 <a:cs typeface="Amiri" pitchFamily="2" charset="-78"/>
               </a:rPr>
               <a:t>نَصُّ السُّؤَالِ</a:t>
@@ -24293,6 +24433,7 @@
                   <a:srgbClr val="1B3B6F"/>
                 </a:solidFill>
                 <a:latin typeface="Amiri" pitchFamily="2" charset="-78"/>
+                <a:ea typeface="Amiri" pitchFamily="2" charset="-78"/>
                 <a:cs typeface="Amiri" pitchFamily="2" charset="-78"/>
               </a:rPr>
               <a:t>سَأَلَتْكِ صَدِيقَتُكِ لِمَاذَا غِبْتِ. اكْتُبِي لَهَا رِسَالَةً (٨٠–٩٠ كَلِمَةً).</a:t>
@@ -24434,6 +24575,7 @@
                   <a:srgbClr val="1B3B6F"/>
                 </a:solidFill>
                 <a:latin typeface="Amiri" pitchFamily="2" charset="-78"/>
+                <a:ea typeface="Amiri" pitchFamily="2" charset="-78"/>
                 <a:cs typeface="Amiri" pitchFamily="2" charset="-78"/>
               </a:rPr>
               <a:t>لِمَاذَا ذَهَبْتِ إِلَى الطَّبِيبِ؟</a:t>
@@ -24575,6 +24717,7 @@
                   <a:srgbClr val="1B3B6F"/>
                 </a:solidFill>
                 <a:latin typeface="Amiri" pitchFamily="2" charset="-78"/>
+                <a:ea typeface="Amiri" pitchFamily="2" charset="-78"/>
                 <a:cs typeface="Amiri" pitchFamily="2" charset="-78"/>
               </a:rPr>
               <a:t>مَاذَا فَعَلَ الطَّبِيبُ؟ وَمَاذَا قَالَ؟</a:t>
@@ -24716,6 +24859,7 @@
                   <a:srgbClr val="1B3B6F"/>
                 </a:solidFill>
                 <a:latin typeface="Amiri" pitchFamily="2" charset="-78"/>
+                <a:ea typeface="Amiri" pitchFamily="2" charset="-78"/>
                 <a:cs typeface="Amiri" pitchFamily="2" charset="-78"/>
               </a:rPr>
               <a:t>مَاذَا اشْتَرَيْتِ مِنَ الصَّيْدَلِيَّةِ؟ وَكَيْفَ تَأْخُذِينَهُ؟</a:t>
@@ -24857,6 +25001,7 @@
                   <a:srgbClr val="1B3B6F"/>
                 </a:solidFill>
                 <a:latin typeface="Amiri" pitchFamily="2" charset="-78"/>
+                <a:ea typeface="Amiri" pitchFamily="2" charset="-78"/>
                 <a:cs typeface="Amiri" pitchFamily="2" charset="-78"/>
               </a:rPr>
               <a:t>مَا نَصِيحَةُ الطَّبِيبِ؟ وَمَتَى سَتَرْجِعِينَ؟</a:t>
@@ -25066,6 +25211,7 @@
                   <a:srgbClr val="D4AF37"/>
                 </a:solidFill>
                 <a:latin typeface="Amiri" pitchFamily="2" charset="-78"/>
+                <a:ea typeface="Amiri" pitchFamily="2" charset="-78"/>
                 <a:cs typeface="Amiri" pitchFamily="2" charset="-78"/>
               </a:rPr>
               <a:t>م</a:t>
@@ -25386,6 +25532,7 @@
                   <a:srgbClr val="8A6D1E"/>
                 </a:solidFill>
                 <a:latin typeface="Amiri" pitchFamily="2" charset="-78"/>
+                <a:ea typeface="Amiri" pitchFamily="2" charset="-78"/>
                 <a:cs typeface="Amiri" pitchFamily="2" charset="-78"/>
               </a:rPr>
               <a:t>قَوَالِبُ الكِتَابَةِ</a:t>
@@ -25666,6 +25813,7 @@
                   <a:srgbClr val="1B3B6F"/>
                 </a:solidFill>
                 <a:latin typeface="Amiri" pitchFamily="2" charset="-78"/>
+                <a:ea typeface="Amiri" pitchFamily="2" charset="-78"/>
                 <a:cs typeface="Amiri" pitchFamily="2" charset="-78"/>
               </a:rPr>
               <a:t>مَرْحَبًا يَا ______ ، كَيْفَ حَالُكِ؟</a:t>
@@ -25872,6 +26020,7 @@
                   <a:srgbClr val="1B3B6F"/>
                 </a:solidFill>
                 <a:latin typeface="Amiri" pitchFamily="2" charset="-78"/>
+                <a:ea typeface="Amiri" pitchFamily="2" charset="-78"/>
                 <a:cs typeface="Amiri" pitchFamily="2" charset="-78"/>
               </a:rPr>
               <a:t>أَمْسِ ذَهَبْتُ إِلَى الطَّبِيبِ لِأَنَّ ______ .</a:t>
@@ -26078,6 +26227,7 @@
                   <a:srgbClr val="1B3B6F"/>
                 </a:solidFill>
                 <a:latin typeface="Amiri" pitchFamily="2" charset="-78"/>
+                <a:ea typeface="Amiri" pitchFamily="2" charset="-78"/>
                 <a:cs typeface="Amiri" pitchFamily="2" charset="-78"/>
               </a:rPr>
               <a:t>فَحَصَنِي الطَّبِيبُ، وَقَالَ: «______».</a:t>
@@ -26284,6 +26434,7 @@
                   <a:srgbClr val="1B3B6F"/>
                 </a:solidFill>
                 <a:latin typeface="Amiri" pitchFamily="2" charset="-78"/>
+                <a:ea typeface="Amiri" pitchFamily="2" charset="-78"/>
                 <a:cs typeface="Amiri" pitchFamily="2" charset="-78"/>
               </a:rPr>
               <a:t>اشْتَرَيْتُ ______ . آخُذُهُ ______ فِي اليَوْمِ.</a:t>
@@ -26490,6 +26641,7 @@
                   <a:srgbClr val="1B3B6F"/>
                 </a:solidFill>
                 <a:latin typeface="Amiri" pitchFamily="2" charset="-78"/>
+                <a:ea typeface="Amiri" pitchFamily="2" charset="-78"/>
                 <a:cs typeface="Amiri" pitchFamily="2" charset="-78"/>
               </a:rPr>
               <a:t>نَصَحَنِي بِأَنْ ______ . سَأَرْجِعُ يَوْمَ ______ .</a:t>
@@ -26696,6 +26848,7 @@
                   <a:srgbClr val="1B3B6F"/>
                 </a:solidFill>
                 <a:latin typeface="Amiri" pitchFamily="2" charset="-78"/>
+                <a:ea typeface="Amiri" pitchFamily="2" charset="-78"/>
                 <a:cs typeface="Amiri" pitchFamily="2" charset="-78"/>
               </a:rPr>
               <a:t>مَعَ السَّلَامَةِ، ______</a:t>
@@ -26935,13 +27088,9 @@
     <a:fontScheme name="Office">
       <a:majorFont>
         <a:latin typeface="Calibri Light" panose="020F0302020204030204"/>
-        <a:ea typeface=""/>
-        <a:cs typeface=""/>
-        <a:font script="Jpan" typeface="游ゴシック Light"/>
-        <a:font script="Hang" typeface="맑은 고딕"/>
-        <a:font script="Hans" typeface="等线 Light"/>
-        <a:font script="Hant" typeface="新細明體"/>
-        <a:font script="Arab" typeface="Times New Roman"/>
+        <a:ea typeface="Amiri" pitchFamily="2" charset="-78"/>
+        <a:cs typeface="Amiri" pitchFamily="2" charset="-78"/>
+        <a:font script="Arab" typeface="Amiri"/>
         <a:font script="Hebr" typeface="Times New Roman"/>
         <a:font script="Thai" typeface="Angsana New"/>
         <a:font script="Ethi" typeface="Nyala"/>
@@ -26987,13 +27136,9 @@
       </a:majorFont>
       <a:minorFont>
         <a:latin typeface="Calibri" panose="020F0502020204030204"/>
-        <a:ea typeface=""/>
-        <a:cs typeface=""/>
-        <a:font script="Jpan" typeface="游ゴシック"/>
-        <a:font script="Hang" typeface="맑은 고딕"/>
-        <a:font script="Hans" typeface="等线"/>
-        <a:font script="Hant" typeface="新細明體"/>
-        <a:font script="Arab" typeface="Arial"/>
+        <a:ea typeface="Amiri" pitchFamily="2" charset="-78"/>
+        <a:cs typeface="Amiri" pitchFamily="2" charset="-78"/>
+        <a:font script="Arab" typeface="Amiri"/>
         <a:font script="Hebr" typeface="Arial"/>
         <a:font script="Thai" typeface="Cordia New"/>
         <a:font script="Ethi" typeface="Nyala"/>

--- a/Topic_A/Exam_Practice/AT-A-L08_Writing_Workshop_Doctor_Pharmacy_and_Advice.pptx
+++ b/Topic_A/Exam_Practice/AT-A-L08_Writing_Workshop_Doctor_Pharmacy_and_Advice.pptx
@@ -3848,7 +3848,7 @@
                 <a:solidFill>
                   <a:srgbClr val="FFFFFF"/>
                 </a:solidFill>
-                <a:latin typeface="Calibri" pitchFamily="34" charset="0"/>
+                <a:latin typeface="Amiri" pitchFamily="2" charset="-78"/>
                 <a:ea typeface="Amiri" pitchFamily="2" charset="-78"/>
                 <a:cs typeface="Amiri" pitchFamily="2" charset="-78"/>
               </a:rPr>
@@ -3914,7 +3914,7 @@
                 <a:solidFill>
                   <a:srgbClr val="FFFFFF"/>
                 </a:solidFill>
-                <a:latin typeface="Calibri" pitchFamily="34" charset="0"/>
+                <a:latin typeface="Amiri" pitchFamily="2" charset="-78"/>
                 <a:ea typeface="Amiri" pitchFamily="2" charset="-78"/>
                 <a:cs typeface="Amiri" pitchFamily="2" charset="-78"/>
               </a:rPr>
@@ -3980,7 +3980,7 @@
                 <a:solidFill>
                   <a:srgbClr val="FFFFFF"/>
                 </a:solidFill>
-                <a:latin typeface="Calibri" pitchFamily="34" charset="0"/>
+                <a:latin typeface="Amiri" pitchFamily="2" charset="-78"/>
                 <a:ea typeface="Amiri" pitchFamily="2" charset="-78"/>
                 <a:cs typeface="Amiri" pitchFamily="2" charset="-78"/>
               </a:rPr>
@@ -4046,7 +4046,7 @@
                 <a:solidFill>
                   <a:srgbClr val="FFFFFF"/>
                 </a:solidFill>
-                <a:latin typeface="Calibri" pitchFamily="34" charset="0"/>
+                <a:latin typeface="Amiri" pitchFamily="2" charset="-78"/>
                 <a:ea typeface="Amiri" pitchFamily="2" charset="-78"/>
                 <a:cs typeface="Amiri" pitchFamily="2" charset="-78"/>
               </a:rPr>
@@ -4864,7 +4864,7 @@
                 <a:solidFill>
                   <a:srgbClr val="FFFFFF"/>
                 </a:solidFill>
-                <a:latin typeface="Calibri" pitchFamily="34" charset="0"/>
+                <a:latin typeface="Amiri" pitchFamily="2" charset="-78"/>
                 <a:ea typeface="Amiri" pitchFamily="2" charset="-78"/>
                 <a:cs typeface="Amiri" pitchFamily="2" charset="-78"/>
               </a:rPr>
@@ -4930,7 +4930,7 @@
                 <a:solidFill>
                   <a:srgbClr val="FFFFFF"/>
                 </a:solidFill>
-                <a:latin typeface="Calibri" pitchFamily="34" charset="0"/>
+                <a:latin typeface="Amiri" pitchFamily="2" charset="-78"/>
                 <a:ea typeface="Amiri" pitchFamily="2" charset="-78"/>
                 <a:cs typeface="Amiri" pitchFamily="2" charset="-78"/>
               </a:rPr>
@@ -4996,7 +4996,7 @@
                 <a:solidFill>
                   <a:srgbClr val="FFFFFF"/>
                 </a:solidFill>
-                <a:latin typeface="Calibri" pitchFamily="34" charset="0"/>
+                <a:latin typeface="Amiri" pitchFamily="2" charset="-78"/>
                 <a:ea typeface="Amiri" pitchFamily="2" charset="-78"/>
                 <a:cs typeface="Amiri" pitchFamily="2" charset="-78"/>
               </a:rPr>
@@ -5062,7 +5062,7 @@
                 <a:solidFill>
                   <a:srgbClr val="FFFFFF"/>
                 </a:solidFill>
-                <a:latin typeface="Calibri" pitchFamily="34" charset="0"/>
+                <a:latin typeface="Amiri" pitchFamily="2" charset="-78"/>
                 <a:ea typeface="Amiri" pitchFamily="2" charset="-78"/>
                 <a:cs typeface="Amiri" pitchFamily="2" charset="-78"/>
               </a:rPr>
@@ -8622,7 +8622,7 @@
                 <a:solidFill>
                   <a:srgbClr val="FFFFFF"/>
                 </a:solidFill>
-                <a:latin typeface="Calibri" pitchFamily="34" charset="0"/>
+                <a:latin typeface="Amiri" pitchFamily="2" charset="-78"/>
                 <a:ea typeface="Amiri" pitchFamily="2" charset="-78"/>
                 <a:cs typeface="Amiri" pitchFamily="2" charset="-78"/>
               </a:rPr>
@@ -8688,7 +8688,7 @@
                 <a:solidFill>
                   <a:srgbClr val="FFFFFF"/>
                 </a:solidFill>
-                <a:latin typeface="Calibri" pitchFamily="34" charset="0"/>
+                <a:latin typeface="Amiri" pitchFamily="2" charset="-78"/>
                 <a:ea typeface="Amiri" pitchFamily="2" charset="-78"/>
                 <a:cs typeface="Amiri" pitchFamily="2" charset="-78"/>
               </a:rPr>
@@ -8754,7 +8754,7 @@
                 <a:solidFill>
                   <a:srgbClr val="FFFFFF"/>
                 </a:solidFill>
-                <a:latin typeface="Calibri" pitchFamily="34" charset="0"/>
+                <a:latin typeface="Amiri" pitchFamily="2" charset="-78"/>
                 <a:ea typeface="Amiri" pitchFamily="2" charset="-78"/>
                 <a:cs typeface="Amiri" pitchFamily="2" charset="-78"/>
               </a:rPr>
@@ -8820,7 +8820,7 @@
                 <a:solidFill>
                   <a:srgbClr val="FFFFFF"/>
                 </a:solidFill>
-                <a:latin typeface="Calibri" pitchFamily="34" charset="0"/>
+                <a:latin typeface="Amiri" pitchFamily="2" charset="-78"/>
                 <a:ea typeface="Amiri" pitchFamily="2" charset="-78"/>
                 <a:cs typeface="Amiri" pitchFamily="2" charset="-78"/>
               </a:rPr>
@@ -9607,7 +9607,7 @@
                 <a:solidFill>
                   <a:srgbClr val="FFFFFF"/>
                 </a:solidFill>
-                <a:latin typeface="Calibri" pitchFamily="34" charset="0"/>
+                <a:latin typeface="Amiri" pitchFamily="2" charset="-78"/>
                 <a:ea typeface="Amiri" pitchFamily="2" charset="-78"/>
                 <a:cs typeface="Amiri" pitchFamily="2" charset="-78"/>
               </a:rPr>
@@ -9673,7 +9673,7 @@
                 <a:solidFill>
                   <a:srgbClr val="FFFFFF"/>
                 </a:solidFill>
-                <a:latin typeface="Calibri" pitchFamily="34" charset="0"/>
+                <a:latin typeface="Amiri" pitchFamily="2" charset="-78"/>
                 <a:ea typeface="Amiri" pitchFamily="2" charset="-78"/>
                 <a:cs typeface="Amiri" pitchFamily="2" charset="-78"/>
               </a:rPr>
@@ -9739,7 +9739,7 @@
                 <a:solidFill>
                   <a:srgbClr val="FFFFFF"/>
                 </a:solidFill>
-                <a:latin typeface="Calibri" pitchFamily="34" charset="0"/>
+                <a:latin typeface="Amiri" pitchFamily="2" charset="-78"/>
                 <a:ea typeface="Amiri" pitchFamily="2" charset="-78"/>
                 <a:cs typeface="Amiri" pitchFamily="2" charset="-78"/>
               </a:rPr>
@@ -9805,7 +9805,7 @@
                 <a:solidFill>
                   <a:srgbClr val="FFFFFF"/>
                 </a:solidFill>
-                <a:latin typeface="Calibri" pitchFamily="34" charset="0"/>
+                <a:latin typeface="Amiri" pitchFamily="2" charset="-78"/>
                 <a:ea typeface="Amiri" pitchFamily="2" charset="-78"/>
                 <a:cs typeface="Amiri" pitchFamily="2" charset="-78"/>
               </a:rPr>
@@ -10592,7 +10592,7 @@
                 <a:solidFill>
                   <a:srgbClr val="FFFFFF"/>
                 </a:solidFill>
-                <a:latin typeface="Calibri" pitchFamily="34" charset="0"/>
+                <a:latin typeface="Amiri" pitchFamily="2" charset="-78"/>
                 <a:ea typeface="Amiri" pitchFamily="2" charset="-78"/>
                 <a:cs typeface="Amiri" pitchFamily="2" charset="-78"/>
               </a:rPr>
@@ -10658,7 +10658,7 @@
                 <a:solidFill>
                   <a:srgbClr val="FFFFFF"/>
                 </a:solidFill>
-                <a:latin typeface="Calibri" pitchFamily="34" charset="0"/>
+                <a:latin typeface="Amiri" pitchFamily="2" charset="-78"/>
                 <a:ea typeface="Amiri" pitchFamily="2" charset="-78"/>
                 <a:cs typeface="Amiri" pitchFamily="2" charset="-78"/>
               </a:rPr>
@@ -10724,7 +10724,7 @@
                 <a:solidFill>
                   <a:srgbClr val="FFFFFF"/>
                 </a:solidFill>
-                <a:latin typeface="Calibri" pitchFamily="34" charset="0"/>
+                <a:latin typeface="Amiri" pitchFamily="2" charset="-78"/>
                 <a:ea typeface="Amiri" pitchFamily="2" charset="-78"/>
                 <a:cs typeface="Amiri" pitchFamily="2" charset="-78"/>
               </a:rPr>
@@ -10790,7 +10790,7 @@
                 <a:solidFill>
                   <a:srgbClr val="FFFFFF"/>
                 </a:solidFill>
-                <a:latin typeface="Calibri" pitchFamily="34" charset="0"/>
+                <a:latin typeface="Amiri" pitchFamily="2" charset="-78"/>
                 <a:ea typeface="Amiri" pitchFamily="2" charset="-78"/>
                 <a:cs typeface="Amiri" pitchFamily="2" charset="-78"/>
               </a:rPr>
